--- a/decks/maths-speed/maths-speed_ch3_calculate-speed.pptx
+++ b/decks/maths-speed/maths-speed_ch3_calculate-speed.pptx
@@ -122,29 +122,29 @@
   <p:extLst>
     <p:ext uri="{521415D9-36F7-43E2-AB2F-B90AF26B5E84}">
       <p14:sectionLst xmlns:p14="http://schemas.microsoft.com/office/powerpoint/2010/main">
-        <p14:section name="Opening" id="{a65e9fc6-f3c0-d789-c669-2ca9abb38d25}">
+        <p14:section name="Opening" id="{57c63c06-bd57-48da-d570-102d7d4422dd}">
           <p14:sldIdLst>
             <p14:sldId id="256"/>
           </p14:sldIdLst>
         </p14:section>
-        <p14:section name="Gate" id="{75f0fc84-cf1a-7245-a5f7-a9209ac05af9}">
+        <p14:section name="Gate" id="{f21ac356-e481-1382-eee5-54d22fc2bfe7}">
           <p14:sldIdLst>
             <p14:sldId id="257"/>
             <p14:sldId id="258"/>
           </p14:sldIdLst>
         </p14:section>
-        <p14:section name="Pre-teach" id="{cb4ad2dc-7fb5-bf90-88e3-1f9ee708648d}">
+        <p14:section name="Pre-teach" id="{2ec1ebcf-b3a2-73db-de38-db9e90b1567e}">
           <p14:sldIdLst>
             <p14:sldId id="259"/>
           </p14:sldIdLst>
         </p14:section>
-        <p14:section name="Read-along" id="{44ee4b6b-31a7-3457-2d35-f4eb5adb1540}">
+        <p14:section name="Read-along" id="{fc5ac0fb-834e-7765-f09a-2646f65df81a}">
           <p14:sldIdLst>
             <p14:sldId id="260"/>
             <p14:sldId id="261"/>
           </p14:sldIdLst>
         </p14:section>
-        <p14:section name="Teach" id="{858c9b72-6f71-c476-c0f9-2a4c0d35119a}">
+        <p14:section name="Teach" id="{676857cb-501a-1932-c355-951c5f13da37}">
           <p14:sldIdLst>
             <p14:sldId id="262"/>
             <p14:sldId id="263"/>
@@ -152,18 +152,18 @@
             <p14:sldId id="265"/>
           </p14:sldIdLst>
         </p14:section>
-        <p14:section name="Routes" id="{e95fd05c-79a5-eb59-d1df-613f41f8e82d}">
+        <p14:section name="Routes" id="{016b44ea-48c1-7580-5448-b7024de24ddc}">
           <p14:sldIdLst>
             <p14:sldId id="266"/>
             <p14:sldId id="267"/>
           </p14:sldIdLst>
         </p14:section>
-        <p14:section name="Close" id="{be2c60ef-cc7c-cd3b-5781-6580ff1e8691}">
+        <p14:section name="Close" id="{77074211-7bb7-2802-cc87-883ae044d92c}">
           <p14:sldIdLst>
             <p14:sldId id="268"/>
           </p14:sldIdLst>
         </p14:section>
-        <p14:section name="Answers" id="{7b5240f8-208f-11be-6457-238271f518e6}">
+        <p14:section name="Answers" id="{415c66fa-0ae0-825f-0b3c-3ed7b18b4018}">
           <p14:sldIdLst>
             <p14:sldId id="269"/>
             <p14:sldId id="270"/>
@@ -9105,7 +9105,7 @@
                 <a:ea typeface="Calibri" pitchFamily="34" charset="-122"/>
                 <a:cs typeface="Calibri" pitchFamily="34" charset="-120"/>
               </a:rPr>
-              <a:t>hours</a:t>
+              <a:t>m</a:t>
             </a:r>
             <a:endParaRPr lang="en-US" sz="2400" dirty="0"/>
           </a:p>
@@ -9142,7 +9142,7 @@
                 <a:ea typeface="Calibri" pitchFamily="34" charset="-122"/>
                 <a:cs typeface="Calibri" pitchFamily="34" charset="-120"/>
               </a:rPr>
-              <a:t>m</a:t>
+              <a:t>hours</a:t>
             </a:r>
             <a:endParaRPr lang="en-US" sz="2400" dirty="0"/>
           </a:p>

--- a/decks/maths-speed/maths-speed_ch3_calculate-speed.pptx
+++ b/decks/maths-speed/maths-speed_ch3_calculate-speed.pptx
@@ -122,29 +122,29 @@
   <p:extLst>
     <p:ext uri="{521415D9-36F7-43E2-AB2F-B90AF26B5E84}">
       <p14:sectionLst xmlns:p14="http://schemas.microsoft.com/office/powerpoint/2010/main">
-        <p14:section name="Opening" id="{57c63c06-bd57-48da-d570-102d7d4422dd}">
+        <p14:section name="Opening" id="{503a62d4-b134-41d2-500d-4dc5acbebeac}">
           <p14:sldIdLst>
             <p14:sldId id="256"/>
           </p14:sldIdLst>
         </p14:section>
-        <p14:section name="Gate" id="{f21ac356-e481-1382-eee5-54d22fc2bfe7}">
+        <p14:section name="Gate" id="{eae403d6-358c-abb0-0ac6-36bf06683243}">
           <p14:sldIdLst>
             <p14:sldId id="257"/>
             <p14:sldId id="258"/>
           </p14:sldIdLst>
         </p14:section>
-        <p14:section name="Pre-teach" id="{2ec1ebcf-b3a2-73db-de38-db9e90b1567e}">
+        <p14:section name="Pre-teach" id="{73bab887-3ec0-7851-98a2-6b3a3e309e72}">
           <p14:sldIdLst>
             <p14:sldId id="259"/>
           </p14:sldIdLst>
         </p14:section>
-        <p14:section name="Read-along" id="{fc5ac0fb-834e-7765-f09a-2646f65df81a}">
+        <p14:section name="Read-along" id="{da845352-06f5-e8da-cac8-acc0fab0d410}">
           <p14:sldIdLst>
             <p14:sldId id="260"/>
             <p14:sldId id="261"/>
           </p14:sldIdLst>
         </p14:section>
-        <p14:section name="Teach" id="{676857cb-501a-1932-c355-951c5f13da37}">
+        <p14:section name="Teach" id="{73acd2dd-c74e-838b-78e5-4d8aeeef53e6}">
           <p14:sldIdLst>
             <p14:sldId id="262"/>
             <p14:sldId id="263"/>
@@ -152,18 +152,18 @@
             <p14:sldId id="265"/>
           </p14:sldIdLst>
         </p14:section>
-        <p14:section name="Routes" id="{016b44ea-48c1-7580-5448-b7024de24ddc}">
+        <p14:section name="Routes" id="{b1370f03-4954-af74-b329-36e196e31794}">
           <p14:sldIdLst>
             <p14:sldId id="266"/>
             <p14:sldId id="267"/>
           </p14:sldIdLst>
         </p14:section>
-        <p14:section name="Close" id="{77074211-7bb7-2802-cc87-883ae044d92c}">
+        <p14:section name="Close" id="{d697c5b6-1dcb-32e2-4d1b-a48fe3572550}">
           <p14:sldIdLst>
             <p14:sldId id="268"/>
           </p14:sldIdLst>
         </p14:section>
-        <p14:section name="Answers" id="{415c66fa-0ae0-825f-0b3c-3ed7b18b4018}">
+        <p14:section name="Answers" id="{38f3657d-1470-dfa9-7c5f-56e42ac996a8}">
           <p14:sldIdLst>
             <p14:sldId id="269"/>
             <p14:sldId id="270"/>
